--- a/data/deep_dives/carteira_fidc_supersim_0e72dd8f/exports/documentary_comparison.pptx
+++ b/data/deep_dives/carteira_fidc_supersim_0e72dd8f/exports/documentary_comparison.pptx
@@ -4281,7 +4281,7 @@
                       <a:r>
                         <a:rPr sz="1300" b="1">
                           <a:solidFill>
-                            <a:srgbClr val="1F1F1F"/>
+                            <a:srgbClr val="FFFFFF"/>
                           </a:solidFill>
                           <a:latin typeface="Calibri"/>
                         </a:rPr>
@@ -4291,7 +4291,7 @@
                   </a:txBody>
                   <a:tcPr marL="91440" marR="91440" marT="41148" marB="41148" anchor="ctr">
                     <a:solidFill>
-                      <a:srgbClr val="EC7000"/>
+                      <a:srgbClr val="FF6200"/>
                     </a:solidFill>
                     <a:lnL>
                       <a:noFill/>
@@ -4330,7 +4330,7 @@
                       <a:r>
                         <a:rPr sz="1300" b="1">
                           <a:solidFill>
-                            <a:srgbClr val="1F1F1F"/>
+                            <a:srgbClr val="FFFFFF"/>
                           </a:solidFill>
                           <a:latin typeface="Calibri"/>
                         </a:rPr>
@@ -4340,7 +4340,7 @@
                   </a:txBody>
                   <a:tcPr marL="91440" marR="91440" marT="41148" marB="41148" anchor="ctr">
                     <a:solidFill>
-                      <a:srgbClr val="EC7000"/>
+                      <a:srgbClr val="FF6200"/>
                     </a:solidFill>
                     <a:lnL>
                       <a:noFill/>
@@ -4720,7 +4720,7 @@
                           </a:solidFill>
                           <a:latin typeface="Calibri"/>
                         </a:rPr>
-                        <a:t>Créditos representados por CCB; garantia específica por contrato não confirmada</a:t>
+                        <a:t>Créditos representados por CCB</a:t>
                       </a:r>
                     </a:p>
                   </a:txBody>
@@ -5118,7 +5118,7 @@
                       <a:r>
                         <a:rPr sz="1300" b="1">
                           <a:solidFill>
-                            <a:srgbClr val="1F1F1F"/>
+                            <a:srgbClr val="FFFFFF"/>
                           </a:solidFill>
                           <a:latin typeface="Calibri"/>
                         </a:rPr>
@@ -5128,7 +5128,7 @@
                   </a:txBody>
                   <a:tcPr marL="91440" marR="91440" marT="41148" marB="41148" anchor="ctr">
                     <a:solidFill>
-                      <a:srgbClr val="EC7000"/>
+                      <a:srgbClr val="FF6200"/>
                     </a:solidFill>
                     <a:lnL>
                       <a:noFill/>
@@ -5167,7 +5167,7 @@
                       <a:r>
                         <a:rPr sz="1300" b="1">
                           <a:solidFill>
-                            <a:srgbClr val="1F1F1F"/>
+                            <a:srgbClr val="FFFFFF"/>
                           </a:solidFill>
                           <a:latin typeface="Calibri"/>
                         </a:rPr>
@@ -5177,7 +5177,7 @@
                   </a:txBody>
                   <a:tcPr marL="91440" marR="91440" marT="41148" marB="41148" anchor="ctr">
                     <a:solidFill>
-                      <a:srgbClr val="EC7000"/>
+                      <a:srgbClr val="FF6200"/>
                     </a:solidFill>
                     <a:lnL>
                       <a:noFill/>
@@ -5699,7 +5699,7 @@
                           </a:solidFill>
                           <a:latin typeface="Calibri"/>
                         </a:rPr>
-                        <a:t>Não localizado nas fontes acessíveis desta leitura</a:t>
+                        <a:t>-</a:t>
                       </a:r>
                     </a:p>
                   </a:txBody>
@@ -5903,7 +5903,7 @@
                       <a:r>
                         <a:rPr sz="1300" b="1">
                           <a:solidFill>
-                            <a:srgbClr val="1F1F1F"/>
+                            <a:srgbClr val="FFFFFF"/>
                           </a:solidFill>
                           <a:latin typeface="Calibri"/>
                         </a:rPr>
@@ -5913,7 +5913,7 @@
                   </a:txBody>
                   <a:tcPr marL="91440" marR="91440" marT="41148" marB="41148" anchor="ctr">
                     <a:solidFill>
-                      <a:srgbClr val="EC7000"/>
+                      <a:srgbClr val="FF6200"/>
                     </a:solidFill>
                     <a:lnL>
                       <a:noFill/>
@@ -5952,7 +5952,7 @@
                       <a:r>
                         <a:rPr sz="1300" b="1">
                           <a:solidFill>
-                            <a:srgbClr val="1F1F1F"/>
+                            <a:srgbClr val="FFFFFF"/>
                           </a:solidFill>
                           <a:latin typeface="Calibri"/>
                         </a:rPr>
@@ -5962,7 +5962,7 @@
                   </a:txBody>
                   <a:tcPr marL="91440" marR="91440" marT="41148" marB="41148" anchor="ctr">
                     <a:solidFill>
-                      <a:srgbClr val="EC7000"/>
+                      <a:srgbClr val="FF6200"/>
                     </a:solidFill>
                     <a:lnL>
                       <a:noFill/>
@@ -6740,7 +6740,7 @@
                       <a:r>
                         <a:rPr sz="1300" b="1">
                           <a:solidFill>
-                            <a:srgbClr val="1F1F1F"/>
+                            <a:srgbClr val="FFFFFF"/>
                           </a:solidFill>
                           <a:latin typeface="Calibri"/>
                         </a:rPr>
@@ -6750,7 +6750,7 @@
                   </a:txBody>
                   <a:tcPr marL="91440" marR="91440" marT="41148" marB="41148" anchor="ctr">
                     <a:solidFill>
-                      <a:srgbClr val="EC7000"/>
+                      <a:srgbClr val="FF6200"/>
                     </a:solidFill>
                     <a:lnL>
                       <a:noFill/>
@@ -6789,7 +6789,7 @@
                       <a:r>
                         <a:rPr sz="1300" b="1">
                           <a:solidFill>
-                            <a:srgbClr val="1F1F1F"/>
+                            <a:srgbClr val="FFFFFF"/>
                           </a:solidFill>
                           <a:latin typeface="Calibri"/>
                         </a:rPr>
@@ -6799,7 +6799,7 @@
                   </a:txBody>
                   <a:tcPr marL="91440" marR="91440" marT="41148" marB="41148" anchor="ctr">
                     <a:solidFill>
-                      <a:srgbClr val="EC7000"/>
+                      <a:srgbClr val="FF6200"/>
                     </a:solidFill>
                     <a:lnL>
                       <a:noFill/>
@@ -7385,7 +7385,7 @@
                       <a:r>
                         <a:rPr sz="1300" b="1">
                           <a:solidFill>
-                            <a:srgbClr val="1F1F1F"/>
+                            <a:srgbClr val="FFFFFF"/>
                           </a:solidFill>
                           <a:latin typeface="Calibri"/>
                         </a:rPr>
@@ -7395,7 +7395,7 @@
                   </a:txBody>
                   <a:tcPr marL="91440" marR="91440" marT="41148" marB="41148" anchor="ctr">
                     <a:solidFill>
-                      <a:srgbClr val="EC7000"/>
+                      <a:srgbClr val="FF6200"/>
                     </a:solidFill>
                     <a:lnL>
                       <a:noFill/>
@@ -7434,7 +7434,7 @@
                       <a:r>
                         <a:rPr sz="1300" b="1">
                           <a:solidFill>
-                            <a:srgbClr val="1F1F1F"/>
+                            <a:srgbClr val="FFFFFF"/>
                           </a:solidFill>
                           <a:latin typeface="Calibri"/>
                         </a:rPr>
@@ -7444,7 +7444,7 @@
                   </a:txBody>
                   <a:tcPr marL="91440" marR="91440" marT="41148" marB="41148" anchor="ctr">
                     <a:solidFill>
-                      <a:srgbClr val="EC7000"/>
+                      <a:srgbClr val="FF6200"/>
                     </a:solidFill>
                     <a:lnL>
                       <a:noFill/>
@@ -7934,7 +7934,7 @@
                       <a:r>
                         <a:rPr sz="1300" b="1">
                           <a:solidFill>
-                            <a:srgbClr val="1F1F1F"/>
+                            <a:srgbClr val="FFFFFF"/>
                           </a:solidFill>
                           <a:latin typeface="Calibri"/>
                         </a:rPr>
@@ -7944,7 +7944,7 @@
                   </a:txBody>
                   <a:tcPr marL="91440" marR="91440" marT="41148" marB="41148" anchor="ctr">
                     <a:solidFill>
-                      <a:srgbClr val="EC7000"/>
+                      <a:srgbClr val="FF6200"/>
                     </a:solidFill>
                     <a:lnL>
                       <a:noFill/>
@@ -7983,7 +7983,7 @@
                       <a:r>
                         <a:rPr sz="1300" b="1">
                           <a:solidFill>
-                            <a:srgbClr val="1F1F1F"/>
+                            <a:srgbClr val="FFFFFF"/>
                           </a:solidFill>
                           <a:latin typeface="Calibri"/>
                         </a:rPr>
@@ -7993,7 +7993,7 @@
                   </a:txBody>
                   <a:tcPr marL="91440" marR="91440" marT="41148" marB="41148" anchor="ctr">
                     <a:solidFill>
-                      <a:srgbClr val="EC7000"/>
+                      <a:srgbClr val="FF6200"/>
                     </a:solidFill>
                     <a:lnL>
                       <a:noFill/>
@@ -8505,7 +8505,7 @@
                       <a:r>
                         <a:rPr sz="1300" b="1">
                           <a:solidFill>
-                            <a:srgbClr val="1F1F1F"/>
+                            <a:srgbClr val="FFFFFF"/>
                           </a:solidFill>
                           <a:latin typeface="Calibri"/>
                         </a:rPr>
@@ -8515,7 +8515,7 @@
                   </a:txBody>
                   <a:tcPr marL="91440" marR="91440" marT="41148" marB="41148" anchor="ctr">
                     <a:solidFill>
-                      <a:srgbClr val="EC7000"/>
+                      <a:srgbClr val="FF6200"/>
                     </a:solidFill>
                     <a:lnL>
                       <a:noFill/>
@@ -8554,7 +8554,7 @@
                       <a:r>
                         <a:rPr sz="1300" b="1">
                           <a:solidFill>
-                            <a:srgbClr val="1F1F1F"/>
+                            <a:srgbClr val="FFFFFF"/>
                           </a:solidFill>
                           <a:latin typeface="Calibri"/>
                         </a:rPr>
@@ -8564,7 +8564,7 @@
                   </a:txBody>
                   <a:tcPr marL="91440" marR="91440" marT="41148" marB="41148" anchor="ctr">
                     <a:solidFill>
-                      <a:srgbClr val="EC7000"/>
+                      <a:srgbClr val="FF6200"/>
                     </a:solidFill>
                     <a:lnL>
                       <a:noFill/>
@@ -8678,7 +8678,7 @@
                           </a:solidFill>
                           <a:latin typeface="Calibri"/>
                         </a:rPr>
-                        <a:t>Direitos creditórios / PL e cotas subordinadas / PL; validar fórmula contratual antes de comparar</a:t>
+                        <a:t>Direitos creditórios / PL e cotas subordinadas / PL</a:t>
                       </a:r>
                     </a:p>
                   </a:txBody>
@@ -8968,7 +8968,7 @@
                           </a:solidFill>
                           <a:latin typeface="Calibri"/>
                         </a:rPr>
-                        <a:t>Sem competência IME carregada em cache local</a:t>
+                        <a:t>-</a:t>
                       </a:r>
                     </a:p>
                   </a:txBody>
